--- a/polaris/Polaris Kubernetes Configuration Validation.pptx
+++ b/polaris/Polaris Kubernetes Configuration Validation.pptx
@@ -601,10 +601,14 @@
           <a:lstStyle/>
           <a:p>
             <a:r>
-              <a:rPr lang="en-US" dirty="0"/>
               <a:t>Now, Polaris or native tools? Kubernetes has Pod Security Admission. You add a label to the namespace, for example restricted. It is simple, but it only checks Pod security. Kubernetes also has ValidatingAdmissionPolicy, with CEL. It is very powerful, but you must write all the rules. Both run in the cluster, so you see the error late, on apply. Polaris runs before, in the PR. (1:15)</a:t>
             </a:r>
-            <a:endParaRPr lang="en-US" dirty="0"/>
+          </a:p>
+          <a:p/>
+          <a:p>
+            <a:r>
+              <a:t>▶ DEMO (1:30) - terminal: skip Jenkins with kubectl. Privileged Pod rejected; insecure Deployment created, but its Pods are rejected (see events). Back to slides.</a:t>
+            </a:r>
           </a:p>
         </p:txBody>
       </p:sp>
@@ -1305,10 +1309,14 @@
           <a:lstStyle/>
           <a:p>
             <a:r>
-              <a:rPr lang="en-US" dirty="0"/>
               <a:t>This is the real output from Polaris. The score is 35. There are 24 problems, and 6 are danger. Kubernetes does not block any of them. Then I fixed the file. I added securityContext, resources, probes, an image tag, 3 replicas, a PDB and a NetworkPolicy. Now the score is 100. (1:00)</a:t>
             </a:r>
-            <a:endParaRPr lang="en-US" dirty="0"/>
+          </a:p>
+          <a:p/>
+          <a:p>
+            <a:r>
+              <a:t>▶ DEMO (1:30) - terminal: polaris audit on examples/bad (score 35), then examples/good (score 100). Show the two files side by side in the editor. Back to slides.</a:t>
+            </a:r>
           </a:p>
         </p:txBody>
       </p:sp>
@@ -1393,10 +1401,14 @@
           <a:lstStyle/>
           <a:p>
             <a:r>
-              <a:rPr lang="en-US" dirty="0"/>
               <a:t>You can also write your own rules, with JSON Schema. In this example, images must come from our registry. In the repo, I also have a rule for the team label. The perfect file had 100. With our rules, it has 90. Polaris does not know your company, so you add your rules. (0:45)</a:t>
             </a:r>
-            <a:endParaRPr lang="en-US" dirty="0"/>
+          </a:p>
+          <a:p/>
+          <a:p>
+            <a:r>
+              <a:t>▶ DEMO (1:00) - editor: polaris-config.yaml (customChecks). Terminal: polaris audit --config polaris-config.yaml on examples/good (score 90). Back to slides.</a:t>
+            </a:r>
           </a:p>
         </p:txBody>
       </p:sp>
@@ -1481,10 +1493,14 @@
           <a:lstStyle/>
           <a:p>
             <a:r>
-              <a:rPr lang="en-US" dirty="0"/>
               <a:t>Some apps must break a rule. For example, kube-proxy and the CNI need hostNetwork. You can add an exception in the config file, or in the YAML file with an annotation. The good part: everyone can see the exception in the PR. (0:30)</a:t>
             </a:r>
-            <a:endParaRPr lang="en-US" dirty="0"/>
+          </a:p>
+          <a:p/>
+          <a:p>
+            <a:r>
+              <a:t>▶ DEMO (0:30) - editor: the exemptions block at the end of polaris-config.yaml. Back to slides.</a:t>
+            </a:r>
           </a:p>
         </p:txBody>
       </p:sp>
@@ -1569,10 +1585,14 @@
           <a:lstStyle/>
           <a:p>
             <a:r>
-              <a:rPr lang="en-US" dirty="0"/>
               <a:t>Now let's put Polaris in the pipeline. With these two flags, Polaris returns an exit code. Exit code 3 means a danger problem. Exit code 4 means the score is too low. Make the job a required check, and nobody can merge the PR. My tip: start with warnings and a low score. Then go up a little every sprint. (0:45)</a:t>
             </a:r>
-            <a:endParaRPr lang="en-US" dirty="0"/>
+          </a:p>
+          <a:p/>
+          <a:p>
+            <a:r>
+              <a:t>▶ DEMO (3:00) - editor: lab/demo-app/Jenkinsfile. Jenkins: build main (100, deploy), feature/insecure (exit 3, no deploy), feature/untrusted-registry (95, but blocked). Back to slides.</a:t>
+            </a:r>
           </a:p>
         </p:txBody>
       </p:sp>
@@ -13357,7 +13377,7 @@
                 <a:ea typeface="JetBrains Mono" pitchFamily="49" charset="-122"/>
                 <a:cs typeface="JetBrains Mono" pitchFamily="49" charset="-120"/>
               </a:rPr>
-              <a:t># .github/workflows/polaris.yaml</a:t>
+              <a:t>// Jenkinsfile</a:t>
             </a:r>
             <a:endParaRPr lang="en-US" sz="1200" dirty="0"/>
           </a:p>
@@ -13377,7 +13397,7 @@
                 <a:ea typeface="JetBrains Mono" pitchFamily="49" charset="-122"/>
                 <a:cs typeface="JetBrains Mono" pitchFamily="49" charset="-120"/>
               </a:rPr>
-              <a:t>on: pull_request</a:t>
+              <a:t>stage('Polaris audit') {</a:t>
             </a:r>
             <a:endParaRPr lang="en-US" sz="1200" dirty="0"/>
           </a:p>
@@ -13397,7 +13417,7 @@
                 <a:ea typeface="JetBrains Mono" pitchFamily="49" charset="-122"/>
                 <a:cs typeface="JetBrains Mono" pitchFamily="49" charset="-120"/>
               </a:rPr>
-              <a:t>jobs:</a:t>
+              <a:t>  steps {</a:t>
             </a:r>
             <a:endParaRPr lang="en-US" sz="1200" dirty="0"/>
           </a:p>
@@ -13417,7 +13437,7 @@
                 <a:ea typeface="JetBrains Mono" pitchFamily="49" charset="-122"/>
                 <a:cs typeface="JetBrains Mono" pitchFamily="49" charset="-120"/>
               </a:rPr>
-              <a:t>  polaris:</a:t>
+              <a:t>    sh '''</a:t>
             </a:r>
             <a:endParaRPr lang="en-US" sz="1200" dirty="0"/>
           </a:p>
@@ -13437,7 +13457,7 @@
                 <a:ea typeface="JetBrains Mono" pitchFamily="49" charset="-122"/>
                 <a:cs typeface="JetBrains Mono" pitchFamily="49" charset="-120"/>
               </a:rPr>
-              <a:t>    runs-on: ubuntu-latest</a:t>
+              <a:t>      polaris audit \</a:t>
             </a:r>
             <a:endParaRPr lang="en-US" sz="1200" dirty="0"/>
           </a:p>
@@ -13457,7 +13477,7 @@
                 <a:ea typeface="JetBrains Mono" pitchFamily="49" charset="-122"/>
                 <a:cs typeface="JetBrains Mono" pitchFamily="49" charset="-120"/>
               </a:rPr>
-              <a:t>    steps:</a:t>
+              <a:t>        --config polaris-config.yaml \</a:t>
             </a:r>
             <a:endParaRPr lang="en-US" sz="1200" dirty="0"/>
           </a:p>
@@ -13477,7 +13497,7 @@
                 <a:ea typeface="JetBrains Mono" pitchFamily="49" charset="-122"/>
                 <a:cs typeface="JetBrains Mono" pitchFamily="49" charset="-120"/>
               </a:rPr>
-              <a:t>      - uses: actions/checkout@v4</a:t>
+              <a:t>        --audit-path k8s/ \</a:t>
             </a:r>
             <a:endParaRPr lang="en-US" sz="1200" dirty="0"/>
           </a:p>
@@ -13497,37 +13517,19 @@
                 <a:ea typeface="JetBrains Mono" pitchFamily="49" charset="-122"/>
                 <a:cs typeface="JetBrains Mono" pitchFamily="49" charset="-120"/>
               </a:rPr>
-              <a:t>      - run: |</a:t>
-            </a:r>
-            <a:endParaRPr lang="en-US" sz="1200" dirty="0"/>
-          </a:p>
-          <a:p>
-            <a:pPr algn="l" indent="0" marL="0">
-              <a:lnSpc>
-                <a:spcPts val="1800"/>
-              </a:lnSpc>
-              <a:buNone/>
-            </a:pPr>
+              <a:t>        </a:t>
+            </a:r>
             <a:r>
               <a:rPr lang="en-US" sz="1200" dirty="0">
                 <a:solidFill>
-                  <a:srgbClr val="E6EDF5"/>
+                  <a:srgbClr val="F2A33A"/>
                 </a:solidFill>
                 <a:latin typeface="JetBrains Mono" pitchFamily="49" charset="0"/>
                 <a:ea typeface="JetBrains Mono" pitchFamily="49" charset="-122"/>
                 <a:cs typeface="JetBrains Mono" pitchFamily="49" charset="-120"/>
               </a:rPr>
-              <a:t>          polaris audit \</a:t>
-            </a:r>
-            <a:endParaRPr lang="en-US" sz="1200" dirty="0"/>
-          </a:p>
-          <a:p>
-            <a:pPr algn="l" indent="0" marL="0">
-              <a:lnSpc>
-                <a:spcPts val="1800"/>
-              </a:lnSpc>
-              <a:buNone/>
-            </a:pPr>
+              <a:t>--set-exit-code-on-danger</a:t>
+            </a:r>
             <a:r>
               <a:rPr lang="en-US" sz="1200" dirty="0">
                 <a:solidFill>
@@ -13537,7 +13539,7 @@
                 <a:ea typeface="JetBrains Mono" pitchFamily="49" charset="-122"/>
                 <a:cs typeface="JetBrains Mono" pitchFamily="49" charset="-120"/>
               </a:rPr>
-              <a:t>            --config polaris-config.yaml \</a:t>
+              <a:t> \</a:t>
             </a:r>
             <a:endParaRPr lang="en-US" sz="1200" dirty="0"/>
           </a:p>
@@ -13557,39 +13559,48 @@
                 <a:ea typeface="JetBrains Mono" pitchFamily="49" charset="-122"/>
                 <a:cs typeface="JetBrains Mono" pitchFamily="49" charset="-120"/>
               </a:rPr>
-              <a:t>            --audit-path k8s/ \</a:t>
-            </a:r>
-            <a:endParaRPr lang="en-US" sz="1200" dirty="0"/>
-          </a:p>
-          <a:p>
-            <a:pPr algn="l" indent="0" marL="0">
-              <a:lnSpc>
-                <a:spcPts val="1800"/>
-              </a:lnSpc>
-              <a:buNone/>
-            </a:pPr>
+              <a:t>        </a:t>
+            </a:r>
             <a:r>
               <a:rPr lang="en-US" sz="1200" dirty="0">
                 <a:solidFill>
-                  <a:srgbClr val="E6EDF5"/>
+                  <a:srgbClr val="F2A33A"/>
                 </a:solidFill>
                 <a:latin typeface="JetBrains Mono" pitchFamily="49" charset="0"/>
                 <a:ea typeface="JetBrains Mono" pitchFamily="49" charset="-122"/>
                 <a:cs typeface="JetBrains Mono" pitchFamily="49" charset="-120"/>
               </a:rPr>
-              <a:t>            </a:t>
-            </a:r>
+              <a:t>--set-exit-code-below-score 80</a:t>
+            </a:r>
+            <a:endParaRPr lang="en-US" sz="1200" dirty="0"/>
+          </a:p>
+          <a:p>
+            <a:pPr algn="l" indent="0" marL="0">
+              <a:lnSpc>
+                <a:spcPts val="1800"/>
+              </a:lnSpc>
+              <a:buNone/>
+            </a:pPr>
             <a:r>
               <a:rPr lang="en-US" sz="1200" dirty="0">
                 <a:solidFill>
-                  <a:srgbClr val="F2A33A"/>
+                  <a:srgbClr val="E6EDF5"/>
                 </a:solidFill>
                 <a:latin typeface="JetBrains Mono" pitchFamily="49" charset="0"/>
                 <a:ea typeface="JetBrains Mono" pitchFamily="49" charset="-122"/>
                 <a:cs typeface="JetBrains Mono" pitchFamily="49" charset="-120"/>
               </a:rPr>
-              <a:t>--set-exit-code-on-danger</a:t>
-            </a:r>
+              <a:t>    '''</a:t>
+            </a:r>
+            <a:endParaRPr lang="en-US" sz="1200" dirty="0"/>
+          </a:p>
+          <a:p>
+            <a:pPr algn="l" indent="0" marL="0">
+              <a:lnSpc>
+                <a:spcPts val="1800"/>
+              </a:lnSpc>
+              <a:buNone/>
+            </a:pPr>
             <a:r>
               <a:rPr lang="en-US" sz="1200" dirty="0">
                 <a:solidFill>
@@ -13599,7 +13610,7 @@
                 <a:ea typeface="JetBrains Mono" pitchFamily="49" charset="-122"/>
                 <a:cs typeface="JetBrains Mono" pitchFamily="49" charset="-120"/>
               </a:rPr>
-              <a:t> \</a:t>
+              <a:t>  }</a:t>
             </a:r>
             <a:endParaRPr lang="en-US" sz="1200" dirty="0"/>
           </a:p>
@@ -13619,18 +13630,27 @@
                 <a:ea typeface="JetBrains Mono" pitchFamily="49" charset="-122"/>
                 <a:cs typeface="JetBrains Mono" pitchFamily="49" charset="-120"/>
               </a:rPr>
-              <a:t>            </a:t>
-            </a:r>
+              <a:t>}</a:t>
+            </a:r>
+            <a:endParaRPr lang="en-US" sz="1200" dirty="0"/>
+          </a:p>
+          <a:p>
+            <a:pPr algn="l" indent="0" marL="0">
+              <a:lnSpc>
+                <a:spcPts val="1800"/>
+              </a:lnSpc>
+              <a:buNone/>
+            </a:pPr>
             <a:r>
               <a:rPr lang="en-US" sz="1200" dirty="0">
                 <a:solidFill>
-                  <a:srgbClr val="F2A33A"/>
+                  <a:srgbClr val="E6EDF5"/>
                 </a:solidFill>
                 <a:latin typeface="JetBrains Mono" pitchFamily="49" charset="0"/>
                 <a:ea typeface="JetBrains Mono" pitchFamily="49" charset="-122"/>
                 <a:cs typeface="JetBrains Mono" pitchFamily="49" charset="-120"/>
               </a:rPr>
-              <a:t>--set-exit-code-below-score 80</a:t>
+              <a:t>stage('Deploy') { ... }</a:t>
             </a:r>
             <a:endParaRPr lang="en-US" sz="1200" dirty="0"/>
           </a:p>
